--- a/docs/slides/nankai/nankai_hazard_v0_2026-09-13.pptx
+++ b/docs/slides/nankai/nankai_hazard_v0_2026-09-13.pptx
@@ -209,31 +209,31 @@
                 <c:formatCode>General</c:formatCode>
                 <c:ptCount val="9"/>
                 <c:pt idx="0">
-                  <c:v>71.2</c:v>
+                  <c:v>71.1</c:v>
                 </c:pt>
                 <c:pt idx="1">
-                  <c:v>74.4</c:v>
+                  <c:v>74.3</c:v>
                 </c:pt>
                 <c:pt idx="2">
-                  <c:v>81.2</c:v>
+                  <c:v>81.1</c:v>
                 </c:pt>
                 <c:pt idx="3">
-                  <c:v>88.1</c:v>
+                  <c:v>88.0</c:v>
                 </c:pt>
                 <c:pt idx="4">
-                  <c:v>91.1</c:v>
+                  <c:v>90.9</c:v>
                 </c:pt>
                 <c:pt idx="5">
-                  <c:v>92.2</c:v>
+                  <c:v>92.1</c:v>
                 </c:pt>
                 <c:pt idx="6">
                   <c:v>93.1</c:v>
                 </c:pt>
                 <c:pt idx="7">
-                  <c:v>94.3</c:v>
+                  <c:v>94.2</c:v>
                 </c:pt>
                 <c:pt idx="8">
-                  <c:v>98.2</c:v>
+                  <c:v>98.1</c:v>
                 </c:pt>
               </c:numCache>
             </c:numRef>
@@ -306,31 +306,31 @@
                 <c:formatCode>General</c:formatCode>
                 <c:ptCount val="9"/>
                 <c:pt idx="0">
-                  <c:v>57.0</c:v>
+                  <c:v>54.8</c:v>
                 </c:pt>
                 <c:pt idx="1">
-                  <c:v>60.3</c:v>
+                  <c:v>58.0</c:v>
                 </c:pt>
                 <c:pt idx="2">
-                  <c:v>80.2</c:v>
+                  <c:v>77.9</c:v>
                 </c:pt>
                 <c:pt idx="3">
-                  <c:v>87.1</c:v>
+                  <c:v>84.7</c:v>
                 </c:pt>
                 <c:pt idx="4">
-                  <c:v>90.1</c:v>
+                  <c:v>87.8</c:v>
                 </c:pt>
                 <c:pt idx="5">
-                  <c:v>91.4</c:v>
+                  <c:v>89.0</c:v>
                 </c:pt>
                 <c:pt idx="6">
-                  <c:v>92.7</c:v>
+                  <c:v>89.7</c:v>
                 </c:pt>
                 <c:pt idx="7">
-                  <c:v>93.9</c:v>
+                  <c:v>93.7</c:v>
                 </c:pt>
                 <c:pt idx="8">
-                  <c:v>98.0</c:v>
+                  <c:v>97.9</c:v>
                 </c:pt>
               </c:numCache>
             </c:numRef>
@@ -6510,7 +6510,7 @@
       <p:grpSpPr/>
       <p:pic>
         <p:nvPicPr>
-          <p:cNvPr id="2" name="Picture 1" descr="pout_west_t0.png"/>
+          <p:cNvPr id="2" name="Picture 1" descr="pout_t0_west.png"/>
           <p:cNvPicPr>
             <a:picLocks noChangeAspect="1"/>
           </p:cNvPicPr>
@@ -14162,7 +14162,7 @@
       </p:sp>
       <p:pic>
         <p:nvPicPr>
-          <p:cNvPr id="3" name="Picture 2" descr="pout_west_t0.png"/>
+          <p:cNvPr id="3" name="Picture 2" descr="pout_t0_west.png"/>
           <p:cNvPicPr>
             <a:picLocks noChangeAspect="1"/>
           </p:cNvPicPr>
@@ -14186,7 +14186,7 @@
       </p:pic>
       <p:pic>
         <p:nvPicPr>
-          <p:cNvPr id="4" name="Picture 3" descr="pout_west_t7.png"/>
+          <p:cNvPr id="4" name="Picture 3" descr="pout_t7_west.png"/>
           <p:cNvPicPr>
             <a:picLocks noChangeAspect="1"/>
           </p:cNvPicPr>
@@ -14752,7 +14752,7 @@
       </p:sp>
       <p:pic>
         <p:nvPicPr>
-          <p:cNvPr id="9" name="Picture 8" descr="hazard_west_jshis.png"/>
+          <p:cNvPr id="9" name="Picture 8" descr="hazard_west.png"/>
           <p:cNvPicPr>
             <a:picLocks noChangeAspect="1"/>
           </p:cNvPicPr>
@@ -15335,7 +15335,7 @@
                 <a:ea typeface="Hiragino Sans"/>
                 <a:cs typeface="Hiragino Sans"/>
               </a:rPr>
-              <a:t>1,001万</a:t>
+              <a:t>1,003万</a:t>
             </a:r>
           </a:p>
         </p:txBody>
@@ -16001,7 +16001,7 @@
                           <a:ea typeface="Hiragino Sans"/>
                           <a:cs typeface="Hiragino Sans"/>
                         </a:rPr>
-                        <a:t>1,001 万</a:t>
+                        <a:t>1,003 万</a:t>
                       </a:r>
                     </a:p>
                   </a:txBody>
@@ -16039,7 +16039,7 @@
                           <a:ea typeface="Hiragino Sans"/>
                           <a:cs typeface="Hiragino Sans"/>
                         </a:rPr>
-                        <a:t>1,396 万</a:t>
+                        <a:t>1,458 万</a:t>
                       </a:r>
                     </a:p>
                   </a:txBody>
@@ -16231,7 +16231,7 @@
                           <a:ea typeface="Hiragino Sans"/>
                           <a:cs typeface="Hiragino Sans"/>
                         </a:rPr>
-                        <a:t>697 万</a:t>
+                        <a:t>701 万</a:t>
                       </a:r>
                     </a:p>
                   </a:txBody>
@@ -16269,7 +16269,7 @@
                           <a:ea typeface="Hiragino Sans"/>
                           <a:cs typeface="Hiragino Sans"/>
                         </a:rPr>
-                        <a:t>749 万</a:t>
+                        <a:t>820 万</a:t>
                       </a:r>
                     </a:p>
                   </a:txBody>
@@ -16461,7 +16461,7 @@
                           <a:ea typeface="Hiragino Sans"/>
                           <a:cs typeface="Hiragino Sans"/>
                         </a:rPr>
-                        <a:t>397 万</a:t>
+                        <a:t>403 万</a:t>
                       </a:r>
                     </a:p>
                   </a:txBody>
@@ -16499,7 +16499,7 @@
                           <a:ea typeface="Hiragino Sans"/>
                           <a:cs typeface="Hiragino Sans"/>
                         </a:rPr>
-                        <a:t>448 万</a:t>
+                        <a:t>521 万</a:t>
                       </a:r>
                     </a:p>
                   </a:txBody>
@@ -16691,7 +16691,7 @@
                           <a:ea typeface="Hiragino Sans"/>
                           <a:cs typeface="Hiragino Sans"/>
                         </a:rPr>
-                        <a:t>358 万</a:t>
+                        <a:t>362 万</a:t>
                       </a:r>
                     </a:p>
                   </a:txBody>
@@ -16729,7 +16729,7 @@
                           <a:ea typeface="Hiragino Sans"/>
                           <a:cs typeface="Hiragino Sans"/>
                         </a:rPr>
-                        <a:t>395 万</a:t>
+                        <a:t>466 万</a:t>
                       </a:r>
                     </a:p>
                   </a:txBody>
@@ -17527,7 +17527,7 @@
                 <a:ea typeface="Hiragino Sans"/>
                 <a:cs typeface="Hiragino Sans"/>
               </a:rPr>
-              <a:t>中央値ハザードの故障確率を枝重みにして、電源までの最良経路の生存率 × 半径 80 km の供給余力で指標化。乱数も潮流も無しで 0.8 秒。A の 2 日後と需要加重相関 0.55。</a:t>
+              <a:t>中央値ハザードの故障確率を枝重みにして、電源までの最良経路の生存率 × 半径 80 km の供給余力で指標化。乱数も潮流も無しで 0.8 秒。A の 2 日後と需要加重相関 0.56。</a:t>
             </a:r>
           </a:p>
         </p:txBody>
@@ -18041,7 +18041,7 @@
         <p:spPr>
           <a:xfrm>
             <a:off x="822960" y="5595239"/>
-            <a:ext cx="10801807" cy="695325"/>
+            <a:ext cx="10801807" cy="1004887"/>
           </a:xfrm>
           <a:prstGeom prst="rect">
             <a:avLst/>
@@ -18068,7 +18068,7 @@
                 <a:ea typeface="Hiragino Sans"/>
                 <a:cs typeface="Hiragino Sans"/>
               </a:rPr>
-              <a:t>西日本は 1 つの成分なので不足率が薄まる。一般送配電エリア単位に連系線受電上限を足して判定する形に変えた。内閣府の地域別停電率の構造と一致する。</a:t>
+              <a:t>西日本は 1 つの成分なので不足率が薄まる。一般送配電エリア単位に連系線受電上限を足して判定する形に変えた。内閣府の地域別停電率の構造と一致する。さらに「1 手ずつ」トレースで DC 潮流の ×100 の単位バグを発見し修正した(物理停電は不変)。</a:t>
             </a:r>
           </a:p>
         </p:txBody>
@@ -18372,7 +18372,7 @@
                 <a:ea typeface="Hiragino Sans"/>
                 <a:cs typeface="Hiragino Sans"/>
               </a:rPr>
-              <a:t>✓  ポテンシャル法は優先順位付けに使える（需要加重相関 0.55）</a:t>
+              <a:t>✓  ポテンシャル法は優先順位付けに使える（需要加重相関 0.56）</a:t>
             </a:r>
           </a:p>
         </p:txBody>
